--- a/classes/parte-8-blue-team-deteccion-y-soc/191-analisis-de-logs-de-red-y-proxy/clase-191-presentacion.pptx
+++ b/classes/parte-8-blue-team-deteccion-y-soc/191-analisis-de-logs-de-red-y-proxy/clase-191-presentacion.pptx
@@ -17,6 +17,11 @@
     <p:sldId id="265" r:id="rId16"/>
     <p:sldId id="266" r:id="rId17"/>
     <p:sldId id="267" r:id="rId18"/>
+    <p:sldId id="268" r:id="rId19"/>
+    <p:sldId id="269" r:id="rId20"/>
+    <p:sldId id="270" r:id="rId21"/>
+    <p:sldId id="271" r:id="rId22"/>
+    <p:sldId id="272" r:id="rId23"/>
   </p:sldIdLst>
   <p:sldSz cx="9144000" cy="6858000" type="screen4x3"/>
   <p:notesSz cx="6858000" cy="9144000"/>
@@ -3198,7 +3203,7 @@
                   <a:srgbClr val="0B3D2E"/>
                 </a:solidFill>
               </a:rPr>
-              <a:t>⚠️ Errores comunes</a:t>
+              <a:t>🧰 Herramientas y preparación</a:t>
             </a:r>
           </a:p>
         </p:txBody>
@@ -3236,67 +3241,97 @@
                   <a:srgbClr val="22282E"/>
                 </a:solidFill>
               </a:rPr>
-              <a:t>•  No hay logs de DNS — El resolver no se registra; envía consultas al colector o usa Zeek</a:t>
-            </a:r>
-          </a:p>
-          <a:p>
-            <a:pPr>
-              <a:spcAft>
-                <a:spcPts val="600"/>
-              </a:spcAft>
-            </a:pPr>
-            <a:r>
-              <a:rPr sz="1500">
-                <a:solidFill>
-                  <a:srgbClr val="22282E"/>
-                </a:solidFill>
-              </a:rPr>
-              <a:t>•  Todo el tráfico parece igual — Falta baseline de dominios/UA normales; modela lo habitual</a:t>
-            </a:r>
-          </a:p>
-          <a:p>
-            <a:pPr>
-              <a:spcAft>
-                <a:spcPts val="600"/>
-              </a:spcAft>
-            </a:pPr>
-            <a:r>
-              <a:rPr sz="1500">
-                <a:solidFill>
-                  <a:srgbClr val="22282E"/>
-                </a:solidFill>
-              </a:rPr>
-              <a:t>•  JA3 no discrimina — Cliente común (navegador); combínalo con destino y volumen</a:t>
-            </a:r>
-          </a:p>
-          <a:p>
-            <a:pPr>
-              <a:spcAft>
-                <a:spcPts val="600"/>
-              </a:spcAft>
-            </a:pPr>
-            <a:r>
-              <a:rPr sz="1500">
-                <a:solidFill>
-                  <a:srgbClr val="22282E"/>
-                </a:solidFill>
-              </a:rPr>
-              <a:t>•  PCAP satura el disco — Retención de contenido completo demasiado larga; usa metadatos Zeek</a:t>
-            </a:r>
-          </a:p>
-          <a:p>
-            <a:pPr>
-              <a:spcAft>
-                <a:spcPts val="600"/>
-              </a:spcAft>
-            </a:pPr>
-            <a:r>
-              <a:rPr sz="1500">
-                <a:solidFill>
-                  <a:srgbClr val="22282E"/>
-                </a:solidFill>
-              </a:rPr>
-              <a:t>•  Falsos positivos de CDN — Servicios legítimos con muchos subdominios; añade allowlist</a:t>
+              <a:t>•  En laboratorio aislado con un tap/mirror:</a:t>
+            </a:r>
+          </a:p>
+          <a:p>
+            <a:pPr>
+              <a:spcAft>
+                <a:spcPts val="600"/>
+              </a:spcAft>
+            </a:pPr>
+            <a:r>
+              <a:rPr sz="1500">
+                <a:solidFill>
+                  <a:srgbClr val="22282E"/>
+                </a:solidFill>
+              </a:rPr>
+              <a:t>•  Zeek generando conn/dns/http/ssl.log.</a:t>
+            </a:r>
+          </a:p>
+          <a:p>
+            <a:pPr>
+              <a:spcAft>
+                <a:spcPts val="600"/>
+              </a:spcAft>
+            </a:pPr>
+            <a:r>
+              <a:rPr sz="1500">
+                <a:solidFill>
+                  <a:srgbClr val="22282E"/>
+                </a:solidFill>
+              </a:rPr>
+              <a:t>•  Suricata como IDS complementario para alertas de firma.</a:t>
+            </a:r>
+          </a:p>
+          <a:p>
+            <a:pPr>
+              <a:spcAft>
+                <a:spcPts val="600"/>
+              </a:spcAft>
+            </a:pPr>
+            <a:r>
+              <a:rPr sz="1500">
+                <a:solidFill>
+                  <a:srgbClr val="22282E"/>
+                </a:solidFill>
+              </a:rPr>
+              <a:t>•  Logs de un proxy (Squid) o firewall de laboratorio.</a:t>
+            </a:r>
+          </a:p>
+          <a:p>
+            <a:pPr>
+              <a:spcAft>
+                <a:spcPts val="600"/>
+              </a:spcAft>
+            </a:pPr>
+            <a:r>
+              <a:rPr sz="1500">
+                <a:solidFill>
+                  <a:srgbClr val="22282E"/>
+                </a:solidFill>
+              </a:rPr>
+              <a:t>•  RITA (Real Intelligence Threat Analytics) para analizar beaconing y tunneling sobre logs de Zeek.</a:t>
+            </a:r>
+          </a:p>
+          <a:p>
+            <a:pPr>
+              <a:spcAft>
+                <a:spcPts val="600"/>
+              </a:spcAft>
+            </a:pPr>
+            <a:r>
+              <a:rPr sz="1500">
+                <a:solidFill>
+                  <a:srgbClr val="22282E"/>
+                </a:solidFill>
+              </a:rPr>
+              <a:t>•  Tu SIEM para ingerir y consultar estos logs.</a:t>
+            </a:r>
+          </a:p>
+          <a:p>
+            <a:pPr>
+              <a:spcAft>
+                <a:spcPts val="600"/>
+              </a:spcAft>
+            </a:pPr>
+            <a:r>
+              <a:rPr sz="1500">
+                <a:solidFill>
+                  <a:srgbClr val="22282E"/>
+                </a:solidFill>
+              </a:rPr>
+              <a:t>•  Captura tráfico solo de tu propia red de pruebas.</a:t>
             </a:r>
           </a:p>
         </p:txBody>
@@ -3347,7 +3382,7 @@
                   <a:srgbClr val="0B3D2E"/>
                 </a:solidFill>
               </a:rPr>
-              <a:t>❓ Preguntas frecuentes</a:t>
+              <a:t>🧪 Laboratorio guiado — Caza en la telemetría de red</a:t>
             </a:r>
           </a:p>
         </p:txBody>
@@ -3385,82 +3420,97 @@
                   <a:srgbClr val="22282E"/>
                 </a:solidFill>
               </a:rPr>
-              <a:t>•  ❓ Con TLS everywhere, ¿sigue sirviendo la red?</a:t>
-            </a:r>
-          </a:p>
-          <a:p>
-            <a:pPr>
-              <a:spcAft>
-                <a:spcPts val="600"/>
-              </a:spcAft>
-            </a:pPr>
-            <a:r>
-              <a:rPr sz="1500">
-                <a:solidFill>
-                  <a:srgbClr val="22282E"/>
-                </a:solidFill>
-              </a:rPr>
-              <a:t>•  Sí. Aunque no veas la carga, los metadatos (SNI, JA3, volumen, periodicidad, DNS) delatan C2, beaconing y exfiltración. La red revela el patrón aunque el contenido esté cifrado.</a:t>
-            </a:r>
-          </a:p>
-          <a:p>
-            <a:pPr>
-              <a:spcAft>
-                <a:spcPts val="600"/>
-              </a:spcAft>
-            </a:pPr>
-            <a:r>
-              <a:rPr sz="1500">
-                <a:solidFill>
-                  <a:srgbClr val="22282E"/>
-                </a:solidFill>
-              </a:rPr>
-              <a:t>•  ❓ ¿DNS realmente es tan importante?</a:t>
-            </a:r>
-          </a:p>
-          <a:p>
-            <a:pPr>
-              <a:spcAft>
-                <a:spcPts val="600"/>
-              </a:spcAft>
-            </a:pPr>
-            <a:r>
-              <a:rPr sz="1500">
-                <a:solidFill>
-                  <a:srgbClr val="22282E"/>
-                </a:solidFill>
-              </a:rPr>
-              <a:t>•  Muchísimo. Casi todo ataque resuelve dominios: DGA, tunneling y C2 dejan huella en DNS. Es de las fuentes de mejor relación señal/coste.</a:t>
-            </a:r>
-          </a:p>
-          <a:p>
-            <a:pPr>
-              <a:spcAft>
-                <a:spcPts val="600"/>
-              </a:spcAft>
-            </a:pPr>
-            <a:r>
-              <a:rPr sz="1500">
-                <a:solidFill>
-                  <a:srgbClr val="22282E"/>
-                </a:solidFill>
-              </a:rPr>
-              <a:t>•  ❓ ¿Necesito PCAP completo?</a:t>
-            </a:r>
-          </a:p>
-          <a:p>
-            <a:pPr>
-              <a:spcAft>
-                <a:spcPts val="600"/>
-              </a:spcAft>
-            </a:pPr>
-            <a:r>
-              <a:rPr sz="1500">
-                <a:solidFill>
-                  <a:srgbClr val="22282E"/>
-                </a:solidFill>
-              </a:rPr>
-              <a:t>•  Rara vez y por poco tiempo. Los metadatos de Zeek cubren la mayoría de casos de hunting con una fracción del almacenamiento.</a:t>
+              <a:t>•  Genera tráfico. En la VM, navega, resuelve dominios y descarga un archivo benigno para poblar los logs.</a:t>
+            </a:r>
+          </a:p>
+          <a:p>
+            <a:pPr>
+              <a:spcAft>
+                <a:spcPts val="600"/>
+              </a:spcAft>
+            </a:pPr>
+            <a:r>
+              <a:rPr sz="1500">
+                <a:solidFill>
+                  <a:srgbClr val="22282E"/>
+                </a:solidFill>
+              </a:rPr>
+              <a:t>•  Revisa conn.log. Identifica top talkers por bytes y conexiones a puertos poco comunes.</a:t>
+            </a:r>
+          </a:p>
+          <a:p>
+            <a:pPr>
+              <a:spcAft>
+                <a:spcPts val="600"/>
+              </a:spcAft>
+            </a:pPr>
+            <a:r>
+              <a:rPr sz="1500">
+                <a:solidFill>
+                  <a:srgbClr val="22282E"/>
+                </a:solidFill>
+              </a:rPr>
+              <a:t>•  Analiza DNS. En dns.log, busca dominios de alta entropía o subdominios muy largos (indicio de tunneling). Marca dominios recién vistos.</a:t>
+            </a:r>
+          </a:p>
+          <a:p>
+            <a:pPr>
+              <a:spcAft>
+                <a:spcPts val="600"/>
+              </a:spcAft>
+            </a:pPr>
+            <a:r>
+              <a:rPr sz="1500">
+                <a:solidFill>
+                  <a:srgbClr val="22282E"/>
+                </a:solidFill>
+              </a:rPr>
+              <a:t>•  Inspecciona proxy/http.log. Filtra user-agents raros (p. ej. python-requests, cadenas vacías) y métodos POST voluminosos.</a:t>
+            </a:r>
+          </a:p>
+          <a:p>
+            <a:pPr>
+              <a:spcAft>
+                <a:spcPts val="600"/>
+              </a:spcAft>
+            </a:pPr>
+            <a:r>
+              <a:rPr sz="1500">
+                <a:solidFill>
+                  <a:srgbClr val="22282E"/>
+                </a:solidFill>
+              </a:rPr>
+              <a:t>•  Fingerprint TLS. En ssl.log revisa JA3; compáralo con listas conocidas de herramientas para detectar clientes anómalos.</a:t>
+            </a:r>
+          </a:p>
+          <a:p>
+            <a:pPr>
+              <a:spcAft>
+                <a:spcPts val="600"/>
+              </a:spcAft>
+            </a:pPr>
+            <a:r>
+              <a:rPr sz="1500">
+                <a:solidFill>
+                  <a:srgbClr val="22282E"/>
+                </a:solidFill>
+              </a:rPr>
+              <a:t>•  Ejecuta RITA. Importa los logs de Zeek y corre el análisis de beaconing y DNS tunneling; interpreta el score.</a:t>
+            </a:r>
+          </a:p>
+          <a:p>
+            <a:pPr>
+              <a:spcAft>
+                <a:spcPts val="600"/>
+              </a:spcAft>
+            </a:pPr>
+            <a:r>
+              <a:rPr sz="1500">
+                <a:solidFill>
+                  <a:srgbClr val="22282E"/>
+                </a:solidFill>
+              </a:rPr>
+              <a:t>•  Simula exfiltración lenta. Envía datos benignos en pequeños fragmentos DNS a un servidor de laboratorio y confirma que tus consultas lo detectan.</a:t>
             </a:r>
           </a:p>
         </p:txBody>
@@ -3511,7 +3561,7 @@
                   <a:srgbClr val="0B3D2E"/>
                 </a:solidFill>
               </a:rPr>
-              <a:t>🔗 Referencias</a:t>
+              <a:t>✍️ Ejercicios</a:t>
             </a:r>
           </a:p>
         </p:txBody>
@@ -3549,71 +3599,712 @@
                   <a:srgbClr val="22282E"/>
                 </a:solidFill>
               </a:rPr>
-              <a:t>•  Sanders, C. y Smith, J. Applied Network Security Monitoring. Syngress.</a:t>
-            </a:r>
-          </a:p>
-          <a:p>
-            <a:pPr>
-              <a:spcAft>
-                <a:spcPts val="600"/>
-              </a:spcAft>
-            </a:pPr>
-            <a:r>
-              <a:rPr sz="1500">
-                <a:solidFill>
-                  <a:srgbClr val="22282E"/>
-                </a:solidFill>
-              </a:rPr>
-              <a:t>•  Zeek Documentation — &lt;https://docs.zeek.org/&gt;</a:t>
-            </a:r>
-          </a:p>
-          <a:p>
-            <a:pPr>
-              <a:spcAft>
-                <a:spcPts val="600"/>
-              </a:spcAft>
-            </a:pPr>
-            <a:r>
-              <a:rPr sz="1500">
-                <a:solidFill>
-                  <a:srgbClr val="22282E"/>
-                </a:solidFill>
-              </a:rPr>
-              <a:t>•  RITA — &lt;https://github.com/activecm/rita&gt;</a:t>
-            </a:r>
-          </a:p>
-          <a:p>
-            <a:pPr>
-              <a:spcAft>
-                <a:spcPts val="600"/>
-              </a:spcAft>
-            </a:pPr>
-            <a:r>
-              <a:rPr sz="1500">
-                <a:solidFill>
-                  <a:srgbClr val="22282E"/>
-                </a:solidFill>
-              </a:rPr>
-              <a:t>•  JA3 (Salesforce) — &lt;https://github.com/salesforce/ja3&gt;</a:t>
-            </a:r>
-          </a:p>
-          <a:p>
-            <a:pPr>
-              <a:spcAft>
-                <a:spcPts val="600"/>
-              </a:spcAft>
-            </a:pPr>
-            <a:r>
-              <a:rPr sz="1500">
-                <a:solidFill>
-                  <a:srgbClr val="22282E"/>
-                </a:solidFill>
-              </a:rPr>
-              <a:t>•  Suricata Documentation — &lt;https://docs.suricata.io/&gt;</a:t>
-            </a:r>
-          </a:p>
-        </p:txBody>
-      </p:sp>
+              <a:t>•  Escribe una consulta que liste los 10 dominios con más subconsultas únicas (posible tunneling).</a:t>
+            </a:r>
+          </a:p>
+          <a:p>
+            <a:pPr>
+              <a:spcAft>
+                <a:spcPts val="600"/>
+              </a:spcAft>
+            </a:pPr>
+            <a:r>
+              <a:rPr sz="1500">
+                <a:solidFill>
+                  <a:srgbClr val="22282E"/>
+                </a:solidFill>
+              </a:rPr>
+              <a:t>•  Detecta descargas de ejecutables desde IPs sin dominio asociado.</a:t>
+            </a:r>
+          </a:p>
+          <a:p>
+            <a:pPr>
+              <a:spcAft>
+                <a:spcPts val="600"/>
+              </a:spcAft>
+            </a:pPr>
+            <a:r>
+              <a:rPr sz="1500">
+                <a:solidFill>
+                  <a:srgbClr val="22282E"/>
+                </a:solidFill>
+              </a:rPr>
+              <a:t>•  Explica cómo JA3 ayuda cuando el tráfico está cifrado.</a:t>
+            </a:r>
+          </a:p>
+          <a:p>
+            <a:pPr>
+              <a:spcAft>
+                <a:spcPts val="600"/>
+              </a:spcAft>
+            </a:pPr>
+            <a:r>
+              <a:rPr sz="1500">
+                <a:solidFill>
+                  <a:srgbClr val="22282E"/>
+                </a:solidFill>
+              </a:rPr>
+              <a:t>•  Diseña una detección de user-agent anómalo para tu entorno.</a:t>
+            </a:r>
+          </a:p>
+          <a:p>
+            <a:pPr>
+              <a:spcAft>
+                <a:spcPts val="600"/>
+              </a:spcAft>
+            </a:pPr>
+            <a:r>
+              <a:rPr sz="1500">
+                <a:solidFill>
+                  <a:srgbClr val="22282E"/>
+                </a:solidFill>
+              </a:rPr>
+              <a:t>•  Correlaciona una alerta de red con el proceso de endpoint que la originó.</a:t>
+            </a:r>
+          </a:p>
+          <a:p>
+            <a:pPr>
+              <a:spcAft>
+                <a:spcPts val="600"/>
+              </a:spcAft>
+            </a:pPr>
+            <a:r>
+              <a:rPr sz="1500">
+                <a:solidFill>
+                  <a:srgbClr val="22282E"/>
+                </a:solidFill>
+              </a:rPr>
+              <a:t>•  Interpreta un resultado de beaconing de RITA y decide si escalar.</a:t>
+            </a:r>
+          </a:p>
+        </p:txBody>
+      </p:sp>
+    </p:spTree>
+  </p:cSld>
+  <p:clrMapOvr>
+    <a:masterClrMapping/>
+  </p:clrMapOvr>
+</p:sld>
+</file>
+
+<file path=ppt/slides/slide13.xml><?xml version="1.0" encoding="utf-8"?>
+<p:sld xmlns:a="http://schemas.openxmlformats.org/drawingml/2006/main" xmlns:p="http://schemas.openxmlformats.org/presentationml/2006/main" xmlns:r="http://schemas.openxmlformats.org/officeDocument/2006/relationships">
+  <p:cSld>
+    <p:spTree>
+      <p:nvGrpSpPr>
+        <p:cNvPr id="1" name=""/>
+        <p:cNvGrpSpPr/>
+        <p:nvPr/>
+      </p:nvGrpSpPr>
+      <p:grpSpPr/>
+      <p:sp>
+        <p:nvSpPr>
+          <p:cNvPr id="2" name="TextBox 1"/>
+          <p:cNvSpPr txBox="1"/>
+          <p:nvPr/>
+        </p:nvSpPr>
+        <p:spPr>
+          <a:xfrm>
+            <a:off x="457200" y="320040"/>
+            <a:ext cx="8229600" cy="822960"/>
+          </a:xfrm>
+          <a:prstGeom prst="rect">
+            <a:avLst/>
+          </a:prstGeom>
+          <a:noFill/>
+        </p:spPr>
+        <p:txBody>
+          <a:bodyPr wrap="square">
+            <a:spAutoFit/>
+          </a:bodyPr>
+          <a:lstStyle/>
+          <a:p>
+            <a:r>
+              <a:rPr sz="2600" b="1">
+                <a:solidFill>
+                  <a:srgbClr val="0B3D2E"/>
+                </a:solidFill>
+              </a:rPr>
+              <a:t>📝 Reto verificable</a:t>
+            </a:r>
+          </a:p>
+        </p:txBody>
+      </p:sp>
+      <p:sp>
+        <p:nvSpPr>
+          <p:cNvPr id="3" name="TextBox 2"/>
+          <p:cNvSpPr txBox="1"/>
+          <p:nvPr/>
+        </p:nvSpPr>
+        <p:spPr>
+          <a:xfrm>
+            <a:off x="457200" y="1280160"/>
+            <a:ext cx="8229600" cy="4937760"/>
+          </a:xfrm>
+          <a:prstGeom prst="rect">
+            <a:avLst/>
+          </a:prstGeom>
+          <a:noFill/>
+        </p:spPr>
+        <p:txBody>
+          <a:bodyPr wrap="square">
+            <a:spAutoFit/>
+          </a:bodyPr>
+          <a:lstStyle/>
+          <a:p>
+            <a:pPr>
+              <a:spcAft>
+                <a:spcPts val="600"/>
+              </a:spcAft>
+            </a:pPr>
+            <a:r>
+              <a:rPr sz="1500">
+                <a:solidFill>
+                  <a:srgbClr val="22282E"/>
+                </a:solidFill>
+              </a:rPr>
+              <a:t>•  Detecta en tu laboratorio una actividad de red sospechosa (tunneling DNS o exfiltración por HTTP) usando logs de Zeek/proxy y correlaciónala con el endpoint origen. Criterio de aceptación…</a:t>
+            </a:r>
+          </a:p>
+        </p:txBody>
+      </p:sp>
+    </p:spTree>
+  </p:cSld>
+  <p:clrMapOvr>
+    <a:masterClrMapping/>
+  </p:clrMapOvr>
+</p:sld>
+</file>
+
+<file path=ppt/slides/slide14.xml><?xml version="1.0" encoding="utf-8"?>
+<p:sld xmlns:a="http://schemas.openxmlformats.org/drawingml/2006/main" xmlns:p="http://schemas.openxmlformats.org/presentationml/2006/main" xmlns:r="http://schemas.openxmlformats.org/officeDocument/2006/relationships">
+  <p:cSld>
+    <p:spTree>
+      <p:nvGrpSpPr>
+        <p:cNvPr id="1" name=""/>
+        <p:cNvGrpSpPr/>
+        <p:nvPr/>
+      </p:nvGrpSpPr>
+      <p:grpSpPr/>
+      <p:sp>
+        <p:nvSpPr>
+          <p:cNvPr id="2" name="TextBox 1"/>
+          <p:cNvSpPr txBox="1"/>
+          <p:nvPr/>
+        </p:nvSpPr>
+        <p:spPr>
+          <a:xfrm>
+            <a:off x="457200" y="320040"/>
+            <a:ext cx="8229600" cy="822960"/>
+          </a:xfrm>
+          <a:prstGeom prst="rect">
+            <a:avLst/>
+          </a:prstGeom>
+          <a:noFill/>
+        </p:spPr>
+        <p:txBody>
+          <a:bodyPr wrap="square">
+            <a:spAutoFit/>
+          </a:bodyPr>
+          <a:lstStyle/>
+          <a:p>
+            <a:r>
+              <a:rPr sz="2600" b="1">
+                <a:solidFill>
+                  <a:srgbClr val="0B3D2E"/>
+                </a:solidFill>
+              </a:rPr>
+              <a:t>⚠️ Errores comunes</a:t>
+            </a:r>
+          </a:p>
+        </p:txBody>
+      </p:sp>
+      <p:sp>
+        <p:nvSpPr>
+          <p:cNvPr id="3" name="TextBox 2"/>
+          <p:cNvSpPr txBox="1"/>
+          <p:nvPr/>
+        </p:nvSpPr>
+        <p:spPr>
+          <a:xfrm>
+            <a:off x="457200" y="1280160"/>
+            <a:ext cx="8229600" cy="4937760"/>
+          </a:xfrm>
+          <a:prstGeom prst="rect">
+            <a:avLst/>
+          </a:prstGeom>
+          <a:noFill/>
+        </p:spPr>
+        <p:txBody>
+          <a:bodyPr wrap="square">
+            <a:spAutoFit/>
+          </a:bodyPr>
+          <a:lstStyle/>
+          <a:p>
+            <a:pPr>
+              <a:spcAft>
+                <a:spcPts val="600"/>
+              </a:spcAft>
+            </a:pPr>
+            <a:r>
+              <a:rPr sz="1500">
+                <a:solidFill>
+                  <a:srgbClr val="22282E"/>
+                </a:solidFill>
+              </a:rPr>
+              <a:t>•  No hay logs de DNS — El resolver no se registra; envía consultas al colector o usa Zeek</a:t>
+            </a:r>
+          </a:p>
+          <a:p>
+            <a:pPr>
+              <a:spcAft>
+                <a:spcPts val="600"/>
+              </a:spcAft>
+            </a:pPr>
+            <a:r>
+              <a:rPr sz="1500">
+                <a:solidFill>
+                  <a:srgbClr val="22282E"/>
+                </a:solidFill>
+              </a:rPr>
+              <a:t>•  Todo el tráfico parece igual — Falta baseline de dominios/UA normales; modela lo habitual</a:t>
+            </a:r>
+          </a:p>
+          <a:p>
+            <a:pPr>
+              <a:spcAft>
+                <a:spcPts val="600"/>
+              </a:spcAft>
+            </a:pPr>
+            <a:r>
+              <a:rPr sz="1500">
+                <a:solidFill>
+                  <a:srgbClr val="22282E"/>
+                </a:solidFill>
+              </a:rPr>
+              <a:t>•  JA3 no discrimina — Cliente común (navegador); combínalo con destino y volumen</a:t>
+            </a:r>
+          </a:p>
+          <a:p>
+            <a:pPr>
+              <a:spcAft>
+                <a:spcPts val="600"/>
+              </a:spcAft>
+            </a:pPr>
+            <a:r>
+              <a:rPr sz="1500">
+                <a:solidFill>
+                  <a:srgbClr val="22282E"/>
+                </a:solidFill>
+              </a:rPr>
+              <a:t>•  PCAP satura el disco — Retención de contenido completo demasiado larga; usa metadatos Zeek</a:t>
+            </a:r>
+          </a:p>
+          <a:p>
+            <a:pPr>
+              <a:spcAft>
+                <a:spcPts val="600"/>
+              </a:spcAft>
+            </a:pPr>
+            <a:r>
+              <a:rPr sz="1500">
+                <a:solidFill>
+                  <a:srgbClr val="22282E"/>
+                </a:solidFill>
+              </a:rPr>
+              <a:t>•  Falsos positivos de CDN — Servicios legítimos con muchos subdominios; añade allowlist</a:t>
+            </a:r>
+          </a:p>
+        </p:txBody>
+      </p:sp>
+    </p:spTree>
+  </p:cSld>
+  <p:clrMapOvr>
+    <a:masterClrMapping/>
+  </p:clrMapOvr>
+</p:sld>
+</file>
+
+<file path=ppt/slides/slide15.xml><?xml version="1.0" encoding="utf-8"?>
+<p:sld xmlns:a="http://schemas.openxmlformats.org/drawingml/2006/main" xmlns:p="http://schemas.openxmlformats.org/presentationml/2006/main" xmlns:r="http://schemas.openxmlformats.org/officeDocument/2006/relationships">
+  <p:cSld>
+    <p:spTree>
+      <p:nvGrpSpPr>
+        <p:cNvPr id="1" name=""/>
+        <p:cNvGrpSpPr/>
+        <p:nvPr/>
+      </p:nvGrpSpPr>
+      <p:grpSpPr/>
+      <p:sp>
+        <p:nvSpPr>
+          <p:cNvPr id="2" name="TextBox 1"/>
+          <p:cNvSpPr txBox="1"/>
+          <p:nvPr/>
+        </p:nvSpPr>
+        <p:spPr>
+          <a:xfrm>
+            <a:off x="457200" y="320040"/>
+            <a:ext cx="8229600" cy="822960"/>
+          </a:xfrm>
+          <a:prstGeom prst="rect">
+            <a:avLst/>
+          </a:prstGeom>
+          <a:noFill/>
+        </p:spPr>
+        <p:txBody>
+          <a:bodyPr wrap="square">
+            <a:spAutoFit/>
+          </a:bodyPr>
+          <a:lstStyle/>
+          <a:p>
+            <a:r>
+              <a:rPr sz="2600" b="1">
+                <a:solidFill>
+                  <a:srgbClr val="0B3D2E"/>
+                </a:solidFill>
+              </a:rPr>
+              <a:t>❓ Preguntas frecuentes</a:t>
+            </a:r>
+          </a:p>
+        </p:txBody>
+      </p:sp>
+      <p:sp>
+        <p:nvSpPr>
+          <p:cNvPr id="3" name="TextBox 2"/>
+          <p:cNvSpPr txBox="1"/>
+          <p:nvPr/>
+        </p:nvSpPr>
+        <p:spPr>
+          <a:xfrm>
+            <a:off x="457200" y="1280160"/>
+            <a:ext cx="8229600" cy="4937760"/>
+          </a:xfrm>
+          <a:prstGeom prst="rect">
+            <a:avLst/>
+          </a:prstGeom>
+          <a:noFill/>
+        </p:spPr>
+        <p:txBody>
+          <a:bodyPr wrap="square">
+            <a:spAutoFit/>
+          </a:bodyPr>
+          <a:lstStyle/>
+          <a:p>
+            <a:pPr>
+              <a:spcAft>
+                <a:spcPts val="600"/>
+              </a:spcAft>
+            </a:pPr>
+            <a:r>
+              <a:rPr sz="1500">
+                <a:solidFill>
+                  <a:srgbClr val="22282E"/>
+                </a:solidFill>
+              </a:rPr>
+              <a:t>•  ❓ Con TLS everywhere, ¿sigue sirviendo la red?</a:t>
+            </a:r>
+          </a:p>
+          <a:p>
+            <a:pPr>
+              <a:spcAft>
+                <a:spcPts val="600"/>
+              </a:spcAft>
+            </a:pPr>
+            <a:r>
+              <a:rPr sz="1500">
+                <a:solidFill>
+                  <a:srgbClr val="22282E"/>
+                </a:solidFill>
+              </a:rPr>
+              <a:t>•  Sí. Aunque no veas la carga, los metadatos (SNI, JA3, volumen, periodicidad, DNS) delatan C2, beaconing y exfiltración. La red revela el patrón aunque el contenido esté cifrado.</a:t>
+            </a:r>
+          </a:p>
+          <a:p>
+            <a:pPr>
+              <a:spcAft>
+                <a:spcPts val="600"/>
+              </a:spcAft>
+            </a:pPr>
+            <a:r>
+              <a:rPr sz="1500">
+                <a:solidFill>
+                  <a:srgbClr val="22282E"/>
+                </a:solidFill>
+              </a:rPr>
+              <a:t>•  ❓ ¿DNS realmente es tan importante?</a:t>
+            </a:r>
+          </a:p>
+          <a:p>
+            <a:pPr>
+              <a:spcAft>
+                <a:spcPts val="600"/>
+              </a:spcAft>
+            </a:pPr>
+            <a:r>
+              <a:rPr sz="1500">
+                <a:solidFill>
+                  <a:srgbClr val="22282E"/>
+                </a:solidFill>
+              </a:rPr>
+              <a:t>•  Muchísimo. Casi todo ataque resuelve dominios: DGA, tunneling y C2 dejan huella en DNS. Es de las fuentes de mejor relación señal/coste.</a:t>
+            </a:r>
+          </a:p>
+          <a:p>
+            <a:pPr>
+              <a:spcAft>
+                <a:spcPts val="600"/>
+              </a:spcAft>
+            </a:pPr>
+            <a:r>
+              <a:rPr sz="1500">
+                <a:solidFill>
+                  <a:srgbClr val="22282E"/>
+                </a:solidFill>
+              </a:rPr>
+              <a:t>•  ❓ ¿Necesito PCAP completo?</a:t>
+            </a:r>
+          </a:p>
+          <a:p>
+            <a:pPr>
+              <a:spcAft>
+                <a:spcPts val="600"/>
+              </a:spcAft>
+            </a:pPr>
+            <a:r>
+              <a:rPr sz="1500">
+                <a:solidFill>
+                  <a:srgbClr val="22282E"/>
+                </a:solidFill>
+              </a:rPr>
+              <a:t>•  Rara vez y por poco tiempo. Los metadatos de Zeek cubren la mayoría de casos de hunting con una fracción del almacenamiento.</a:t>
+            </a:r>
+          </a:p>
+        </p:txBody>
+      </p:sp>
+    </p:spTree>
+  </p:cSld>
+  <p:clrMapOvr>
+    <a:masterClrMapping/>
+  </p:clrMapOvr>
+</p:sld>
+</file>
+
+<file path=ppt/slides/slide16.xml><?xml version="1.0" encoding="utf-8"?>
+<p:sld xmlns:a="http://schemas.openxmlformats.org/drawingml/2006/main" xmlns:p="http://schemas.openxmlformats.org/presentationml/2006/main" xmlns:r="http://schemas.openxmlformats.org/officeDocument/2006/relationships">
+  <p:cSld>
+    <p:spTree>
+      <p:nvGrpSpPr>
+        <p:cNvPr id="1" name=""/>
+        <p:cNvGrpSpPr/>
+        <p:nvPr/>
+      </p:nvGrpSpPr>
+      <p:grpSpPr/>
+      <p:sp>
+        <p:nvSpPr>
+          <p:cNvPr id="2" name="TextBox 1"/>
+          <p:cNvSpPr txBox="1"/>
+          <p:nvPr/>
+        </p:nvSpPr>
+        <p:spPr>
+          <a:xfrm>
+            <a:off x="457200" y="320040"/>
+            <a:ext cx="8229600" cy="822960"/>
+          </a:xfrm>
+          <a:prstGeom prst="rect">
+            <a:avLst/>
+          </a:prstGeom>
+          <a:noFill/>
+        </p:spPr>
+        <p:txBody>
+          <a:bodyPr wrap="square">
+            <a:spAutoFit/>
+          </a:bodyPr>
+          <a:lstStyle/>
+          <a:p>
+            <a:r>
+              <a:rPr sz="2600" b="1">
+                <a:solidFill>
+                  <a:srgbClr val="0B3D2E"/>
+                </a:solidFill>
+              </a:rPr>
+              <a:t>🔗 Referencias verificables y alcance</a:t>
+            </a:r>
+          </a:p>
+        </p:txBody>
+      </p:sp>
+      <p:sp>
+        <p:nvSpPr>
+          <p:cNvPr id="3" name="TextBox 2"/>
+          <p:cNvSpPr txBox="1"/>
+          <p:nvPr/>
+        </p:nvSpPr>
+        <p:spPr>
+          <a:xfrm>
+            <a:off x="457200" y="1280160"/>
+            <a:ext cx="8229600" cy="4937760"/>
+          </a:xfrm>
+          <a:prstGeom prst="rect">
+            <a:avLst/>
+          </a:prstGeom>
+          <a:noFill/>
+        </p:spPr>
+        <p:txBody>
+          <a:bodyPr wrap="square">
+            <a:spAutoFit/>
+          </a:bodyPr>
+          <a:lstStyle/>
+          <a:p>
+            <a:pPr>
+              <a:spcAft>
+                <a:spcPts val="600"/>
+              </a:spcAft>
+            </a:pPr>
+            <a:r>
+              <a:rPr sz="1500">
+                <a:solidFill>
+                  <a:srgbClr val="22282E"/>
+                </a:solidFill>
+              </a:rPr>
+              <a:t>•  Zeek, referencia oficial de logs: describe conn.log, DNS, HTTP, TLS y la correlación mediante uid; los campos dependen de protocolos observables y configuración —…</a:t>
+            </a:r>
+          </a:p>
+          <a:p>
+            <a:pPr>
+              <a:spcAft>
+                <a:spcPts val="600"/>
+              </a:spcAft>
+            </a:pPr>
+            <a:r>
+              <a:rPr sz="1500">
+                <a:solidFill>
+                  <a:srgbClr val="22282E"/>
+                </a:solidFill>
+              </a:rPr>
+              <a:t>•  Suricata: documentación oficial de EVE JSON y de los eventos que el sensor puede producir — &lt;https://docs.suricata.io/en/latest/output/eve/eve-json-output.html&gt;</a:t>
+            </a:r>
+          </a:p>
+          <a:p>
+            <a:pPr>
+              <a:spcAft>
+                <a:spcPts val="600"/>
+              </a:spcAft>
+            </a:pPr>
+            <a:r>
+              <a:rPr sz="1500">
+                <a:solidFill>
+                  <a:srgbClr val="22282E"/>
+                </a:solidFill>
+              </a:rPr>
+              <a:t>•  RITA: repositorio del proyecto para análisis de metadatos y periodicidad; sus puntuaciones ordenan investigación y no demuestran por sí solas C2 — &lt;https://github.com/activecm/rita&gt;</a:t>
+            </a:r>
+          </a:p>
+          <a:p>
+            <a:pPr>
+              <a:spcAft>
+                <a:spcPts val="600"/>
+              </a:spcAft>
+            </a:pPr>
+            <a:r>
+              <a:rPr sz="1500">
+                <a:solidFill>
+                  <a:srgbClr val="22282E"/>
+                </a:solidFill>
+              </a:rPr>
+              <a:t>•  JA3: repositorio original del método de huella TLS; se usa como atributo contextual, no como identidad estable de una familia — &lt;https://github.com/salesforce/ja3&gt;</a:t>
+            </a:r>
+          </a:p>
+          <a:p>
+            <a:pPr>
+              <a:spcAft>
+                <a:spcPts val="600"/>
+              </a:spcAft>
+            </a:pPr>
+            <a:r>
+              <a:rPr sz="1500">
+                <a:solidFill>
+                  <a:srgbClr val="22282E"/>
+                </a:solidFill>
+              </a:rPr>
+              <a:t>•  Sanders, C. y Smith, J. Applied Network Security Monitoring. Syngress: bibliografía profesional complementaria sobre análisis de telemetría de red.</a:t>
+            </a:r>
+          </a:p>
+        </p:txBody>
+      </p:sp>
+    </p:spTree>
+  </p:cSld>
+  <p:clrMapOvr>
+    <a:masterClrMapping/>
+  </p:clrMapOvr>
+</p:sld>
+</file>
+
+<file path=ppt/slides/slide17.xml><?xml version="1.0" encoding="utf-8"?>
+<p:sld xmlns:a="http://schemas.openxmlformats.org/drawingml/2006/main" xmlns:p="http://schemas.openxmlformats.org/presentationml/2006/main" xmlns:r="http://schemas.openxmlformats.org/officeDocument/2006/relationships">
+  <p:cSld>
+    <p:spTree>
+      <p:nvGrpSpPr>
+        <p:cNvPr id="1" name=""/>
+        <p:cNvGrpSpPr/>
+        <p:nvPr/>
+      </p:nvGrpSpPr>
+      <p:grpSpPr/>
+      <p:sp>
+        <p:nvSpPr>
+          <p:cNvPr id="2" name="TextBox 1"/>
+          <p:cNvSpPr txBox="1"/>
+          <p:nvPr/>
+        </p:nvSpPr>
+        <p:spPr>
+          <a:xfrm>
+            <a:off x="457200" y="274320"/>
+            <a:ext cx="8229600" cy="640080"/>
+          </a:xfrm>
+          <a:prstGeom prst="rect">
+            <a:avLst/>
+          </a:prstGeom>
+          <a:noFill/>
+        </p:spPr>
+        <p:txBody>
+          <a:bodyPr wrap="square">
+            <a:spAutoFit/>
+          </a:bodyPr>
+          <a:lstStyle/>
+          <a:p>
+            <a:r>
+              <a:rPr sz="2200" b="1">
+                <a:solidFill>
+                  <a:srgbClr val="0B3D2E"/>
+                </a:solidFill>
+              </a:rPr>
+              <a:t>Diagrama de la clase</a:t>
+            </a:r>
+          </a:p>
+        </p:txBody>
+      </p:sp>
+      <p:pic>
+        <p:nvPicPr>
+          <p:cNvPr id="3" name="Picture 2" descr="d07c012e1744be26.png"/>
+          <p:cNvPicPr>
+            <a:picLocks noChangeAspect="1"/>
+          </p:cNvPicPr>
+          <p:nvPr/>
+        </p:nvPicPr>
+        <p:blipFill>
+          <a:blip r:embed="rId2"/>
+          <a:stretch>
+            <a:fillRect/>
+          </a:stretch>
+        </p:blipFill>
+        <p:spPr>
+          <a:xfrm>
+            <a:off x="457200" y="1712960"/>
+            <a:ext cx="8229600" cy="4072159"/>
+          </a:xfrm>
+          <a:prstGeom prst="rect">
+            <a:avLst/>
+          </a:prstGeom>
+        </p:spPr>
+      </p:pic>
     </p:spTree>
   </p:cSld>
   <p:clrMapOvr>
@@ -3698,7 +4389,7 @@
                   <a:srgbClr val="22282E"/>
                 </a:solidFill>
               </a:rPr>
-              <a:t>•  Explotar la telemetría de red —logs de firewall, proxy web, DNS y metadatos de Zeek— para detectar amenazas que el endpoint no ve o que intentan ocultarse. El monitoreo de red (NSM) es complementario al de endpoint: aunque un host esté comprometido y silencie sus logs, el tráfico que genera sigue pasando por la red.</a:t>
+              <a:t>•  Explotar la telemetría de red —logs de firewall, proxy web, DNS y metadatos de Zeek— para detectar amenazas que el endpoint no ve o que intentan ocultarse. El monitoreo de red (NSM) es complementario…</a:t>
             </a:r>
           </a:p>
         </p:txBody>
@@ -4092,7 +4783,7 @@
                   <a:srgbClr val="0B3D2E"/>
                 </a:solidFill>
               </a:rPr>
-              <a:t>📖 Definiciones y características</a:t>
+              <a:t>🧠 Explicación en profundidad</a:t>
             </a:r>
           </a:p>
         </p:txBody>
@@ -4130,97 +4821,97 @@
                   <a:srgbClr val="22282E"/>
                 </a:solidFill>
               </a:rPr>
-              <a:t>•  NSM (Network Security Monitoring): recolección y análisis de datos de red para detectar intrusiones. Característica: visibilidad independiente del host.</a:t>
-            </a:r>
-          </a:p>
-          <a:p>
-            <a:pPr>
-              <a:spcAft>
-                <a:spcPts val="600"/>
-              </a:spcAft>
-            </a:pPr>
-            <a:r>
-              <a:rPr sz="1500">
-                <a:solidFill>
-                  <a:srgbClr val="22282E"/>
-                </a:solidFill>
-              </a:rPr>
-              <a:t>•  conn.log (Zeek): registro de cada conexión con duración, bytes y estado. Característica: base para top talkers y anomalías de volumen.</a:t>
-            </a:r>
-          </a:p>
-          <a:p>
-            <a:pPr>
-              <a:spcAft>
-                <a:spcPts val="600"/>
-              </a:spcAft>
-            </a:pPr>
-            <a:r>
-              <a:rPr sz="1500">
-                <a:solidFill>
-                  <a:srgbClr val="22282E"/>
-                </a:solidFill>
-              </a:rPr>
-              <a:t>•  dns.log (Zeek): consultas y respuestas DNS. Característica: detecta DGA, tunneling y dominios recién registrados.</a:t>
-            </a:r>
-          </a:p>
-          <a:p>
-            <a:pPr>
-              <a:spcAft>
-                <a:spcPts val="600"/>
-              </a:spcAft>
-            </a:pPr>
-            <a:r>
-              <a:rPr sz="1500">
-                <a:solidFill>
-                  <a:srgbClr val="22282E"/>
-                </a:solidFill>
-              </a:rPr>
-              <a:t>•  Proxy log: peticiones web con URL, user-agent, método y respuesta. Característica: revela C2 sobre HTTP/S y descargas.</a:t>
-            </a:r>
-          </a:p>
-          <a:p>
-            <a:pPr>
-              <a:spcAft>
-                <a:spcPts val="600"/>
-              </a:spcAft>
-            </a:pPr>
-            <a:r>
-              <a:rPr sz="1500">
-                <a:solidFill>
-                  <a:srgbClr val="22282E"/>
-                </a:solidFill>
-              </a:rPr>
-              <a:t>•  JA3/JA3S: hash del handshake TLS del cliente/servidor. Característica: identifica herramientas (p. ej. ciertos C2) aun con cifrado.</a:t>
-            </a:r>
-          </a:p>
-          <a:p>
-            <a:pPr>
-              <a:spcAft>
-                <a:spcPts val="600"/>
-              </a:spcAft>
-            </a:pPr>
-            <a:r>
-              <a:rPr sz="1500">
-                <a:solidFill>
-                  <a:srgbClr val="22282E"/>
-                </a:solidFill>
-              </a:rPr>
-              <a:t>•  DNS tunneling: exfiltración/C2 encapsulados en consultas DNS. Característica: dominios largos, alta entropía, muchas subconsultas.</a:t>
-            </a:r>
-          </a:p>
-          <a:p>
-            <a:pPr>
-              <a:spcAft>
-                <a:spcPts val="600"/>
-              </a:spcAft>
-            </a:pPr>
-            <a:r>
-              <a:rPr sz="1500">
-                <a:solidFill>
-                  <a:srgbClr val="22282E"/>
-                </a:solidFill>
-              </a:rPr>
-              <a:t>•  Beaconing: conexiones periódicas y regulares a un C2. Característica: patrón temporal casi constante (se profundiza en la clase 193).</a:t>
+              <a:t>•  La visibilidad de red tiene niveles. Un flujo resume quién habló con quién, cuándo y cuánto; los logs de protocolo añaden DNS, HTTP o TLS; un PCAP conserva bytes, con mayor coste y sensibilidad. Un…</a:t>
+            </a:r>
+          </a:p>
+          <a:p>
+            <a:pPr>
+              <a:spcAft>
+                <a:spcPts val="600"/>
+              </a:spcAft>
+            </a:pPr>
+            <a:r>
+              <a:rPr sz="1500">
+                <a:solidFill>
+                  <a:srgbClr val="22282E"/>
+                </a:solidFill>
+              </a:rPr>
+              <a:t>•  Zeek relaciona conn.log, dns.log, http.log y ssl.log mediante uid. TLS expone metadatos, no el contenido cifrado, y nuevas tecnologías pueden reducir lo visible. Huellas y reputación son señales…</a:t>
+            </a:r>
+          </a:p>
+          <a:p>
+            <a:pPr>
+              <a:spcAft>
+                <a:spcPts val="600"/>
+              </a:spcAft>
+            </a:pPr>
+            <a:r>
+              <a:rPr sz="1500">
+                <a:solidFill>
+                  <a:srgbClr val="22282E"/>
+                </a:solidFill>
+              </a:rPr>
+              <a:t>•  NetFlow o IPFIX permite responder si existió una relación, su duración y volumen aproximado, pero no qué objeto se transfirió. PCAP puede permitir reconstrucción cuando el protocolo no está cifrado y…</a:t>
+            </a:r>
+          </a:p>
+          <a:p>
+            <a:pPr>
+              <a:spcAft>
+                <a:spcPts val="600"/>
+              </a:spcAft>
+            </a:pPr>
+            <a:r>
+              <a:rPr sz="1500">
+                <a:solidFill>
+                  <a:srgbClr val="22282E"/>
+                </a:solidFill>
+              </a:rPr>
+              <a:t>•  El diagrama no muestra fuentes equivalentes, sino complementarias. Una conexión en conn.log comparte uid con DNS, HTTP o TLS cuando Zeek pudo analizarlos. Ese vínculo evita correlacionar únicamente…</a:t>
+            </a:r>
+          </a:p>
+          <a:p>
+            <a:pPr>
+              <a:spcAft>
+                <a:spcPts val="600"/>
+              </a:spcAft>
+            </a:pPr>
+            <a:r>
+              <a:rPr sz="1500">
+                <a:solidFill>
+                  <a:srgbClr val="22282E"/>
+                </a:solidFill>
+              </a:rPr>
+              <a:t>•  En TLS pueden observarse SNI, versión, certificado y parámetros del handshake según versión, sensor y cifrado. Una huella ayuda a agrupar clientes, pero software legítimo puede compartirla y un…</a:t>
+            </a:r>
+          </a:p>
+          <a:p>
+            <a:pPr>
+              <a:spcAft>
+                <a:spcPts val="600"/>
+              </a:spcAft>
+            </a:pPr>
+            <a:r>
+              <a:rPr sz="1500">
+                <a:solidFill>
+                  <a:srgbClr val="22282E"/>
+                </a:solidFill>
+              </a:rPr>
+              <a:t>•  La línea base se segmenta. Un proxy corporativo, un servidor de actualizaciones y una estación no tienen el mismo patrón. También se distingue «nuevo para la organización» de «nuevo para esta…</a:t>
+            </a:r>
+          </a:p>
+          <a:p>
+            <a:pPr>
+              <a:spcAft>
+                <a:spcPts val="600"/>
+              </a:spcAft>
+            </a:pPr>
+            <a:r>
+              <a:rPr sz="1500">
+                <a:solidFill>
+                  <a:srgbClr val="22282E"/>
+                </a:solidFill>
+              </a:rPr>
+              <a:t>•  Pérdida de paquetes, tráfico asimétrico o reloj incorrecto alteran resultados. Se monitorean drops del sensor, interfaces y desfase temporal. Bajo cifrado se afirma lo observado —una sesión con…</a:t>
             </a:r>
           </a:p>
         </p:txBody>
@@ -4271,7 +4962,7 @@
                   <a:srgbClr val="0B3D2E"/>
                 </a:solidFill>
               </a:rPr>
-              <a:t>🧰 Herramientas y preparación</a:t>
+              <a:t>📔 Glosario</a:t>
             </a:r>
           </a:p>
         </p:txBody>
@@ -4309,97 +5000,97 @@
                   <a:srgbClr val="22282E"/>
                 </a:solidFill>
               </a:rPr>
-              <a:t>•  En laboratorio aislado con un tap/mirror:</a:t>
-            </a:r>
-          </a:p>
-          <a:p>
-            <a:pPr>
-              <a:spcAft>
-                <a:spcPts val="600"/>
-              </a:spcAft>
-            </a:pPr>
-            <a:r>
-              <a:rPr sz="1500">
-                <a:solidFill>
-                  <a:srgbClr val="22282E"/>
-                </a:solidFill>
-              </a:rPr>
-              <a:t>•  Zeek generando conn/dns/http/ssl.log.</a:t>
-            </a:r>
-          </a:p>
-          <a:p>
-            <a:pPr>
-              <a:spcAft>
-                <a:spcPts val="600"/>
-              </a:spcAft>
-            </a:pPr>
-            <a:r>
-              <a:rPr sz="1500">
-                <a:solidFill>
-                  <a:srgbClr val="22282E"/>
-                </a:solidFill>
-              </a:rPr>
-              <a:t>•  Suricata como IDS complementario para alertas de firma.</a:t>
-            </a:r>
-          </a:p>
-          <a:p>
-            <a:pPr>
-              <a:spcAft>
-                <a:spcPts val="600"/>
-              </a:spcAft>
-            </a:pPr>
-            <a:r>
-              <a:rPr sz="1500">
-                <a:solidFill>
-                  <a:srgbClr val="22282E"/>
-                </a:solidFill>
-              </a:rPr>
-              <a:t>•  Logs de un proxy (Squid) o firewall de laboratorio.</a:t>
-            </a:r>
-          </a:p>
-          <a:p>
-            <a:pPr>
-              <a:spcAft>
-                <a:spcPts val="600"/>
-              </a:spcAft>
-            </a:pPr>
-            <a:r>
-              <a:rPr sz="1500">
-                <a:solidFill>
-                  <a:srgbClr val="22282E"/>
-                </a:solidFill>
-              </a:rPr>
-              <a:t>•  RITA (Real Intelligence Threat Analytics) para analizar beaconing y tunneling sobre logs de Zeek.</a:t>
-            </a:r>
-          </a:p>
-          <a:p>
-            <a:pPr>
-              <a:spcAft>
-                <a:spcPts val="600"/>
-              </a:spcAft>
-            </a:pPr>
-            <a:r>
-              <a:rPr sz="1500">
-                <a:solidFill>
-                  <a:srgbClr val="22282E"/>
-                </a:solidFill>
-              </a:rPr>
-              <a:t>•  Tu SIEM para ingerir y consultar estos logs.</a:t>
-            </a:r>
-          </a:p>
-          <a:p>
-            <a:pPr>
-              <a:spcAft>
-                <a:spcPts val="600"/>
-              </a:spcAft>
-            </a:pPr>
-            <a:r>
-              <a:rPr sz="1500">
-                <a:solidFill>
-                  <a:srgbClr val="22282E"/>
-                </a:solidFill>
-              </a:rPr>
-              <a:t>•  Captura tráfico solo de tu propia red de pruebas.</a:t>
+              <a:t>•  Flow: resumen de una conversación de red.</a:t>
+            </a:r>
+          </a:p>
+          <a:p>
+            <a:pPr>
+              <a:spcAft>
+                <a:spcPts val="600"/>
+              </a:spcAft>
+            </a:pPr>
+            <a:r>
+              <a:rPr sz="1500">
+                <a:solidFill>
+                  <a:srgbClr val="22282E"/>
+                </a:solidFill>
+              </a:rPr>
+              <a:t>•  PCAP: captura de paquetes.</a:t>
+            </a:r>
+          </a:p>
+          <a:p>
+            <a:pPr>
+              <a:spcAft>
+                <a:spcPts val="600"/>
+              </a:spcAft>
+            </a:pPr>
+            <a:r>
+              <a:rPr sz="1500">
+                <a:solidFill>
+                  <a:srgbClr val="22282E"/>
+                </a:solidFill>
+              </a:rPr>
+              <a:t>•  Metadato: campo interpretado sin conservar todo el contenido.</a:t>
+            </a:r>
+          </a:p>
+          <a:p>
+            <a:pPr>
+              <a:spcAft>
+                <a:spcPts val="600"/>
+              </a:spcAft>
+            </a:pPr>
+            <a:r>
+              <a:rPr sz="1500">
+                <a:solidFill>
+                  <a:srgbClr val="22282E"/>
+                </a:solidFill>
+              </a:rPr>
+              <a:t>•  Zeek UID: identificador para unir logs de una conexión.</a:t>
+            </a:r>
+          </a:p>
+          <a:p>
+            <a:pPr>
+              <a:spcAft>
+                <a:spcPts val="600"/>
+              </a:spcAft>
+            </a:pPr>
+            <a:r>
+              <a:rPr sz="1500">
+                <a:solidFill>
+                  <a:srgbClr val="22282E"/>
+                </a:solidFill>
+              </a:rPr>
+              <a:t>•  Proxy explícito: intermediario configurado por el cliente.</a:t>
+            </a:r>
+          </a:p>
+          <a:p>
+            <a:pPr>
+              <a:spcAft>
+                <a:spcPts val="600"/>
+              </a:spcAft>
+            </a:pPr>
+            <a:r>
+              <a:rPr sz="1500">
+                <a:solidFill>
+                  <a:srgbClr val="22282E"/>
+                </a:solidFill>
+              </a:rPr>
+              <a:t>•  TLS fingerprint: huella del handshake observado.</a:t>
+            </a:r>
+          </a:p>
+          <a:p>
+            <a:pPr>
+              <a:spcAft>
+                <a:spcPts val="600"/>
+              </a:spcAft>
+            </a:pPr>
+            <a:r>
+              <a:rPr sz="1500">
+                <a:solidFill>
+                  <a:srgbClr val="22282E"/>
+                </a:solidFill>
+              </a:rPr>
+              <a:t>•  Egress: tráfico que sale de una zona.</a:t>
             </a:r>
           </a:p>
         </p:txBody>
@@ -4450,7 +5141,7 @@
                   <a:srgbClr val="0B3D2E"/>
                 </a:solidFill>
               </a:rPr>
-              <a:t>🧪 Laboratorio guiado — Caza en la telemetría de red</a:t>
+              <a:t>📖 Definiciones y características</a:t>
             </a:r>
           </a:p>
         </p:txBody>
@@ -4488,97 +5179,97 @@
                   <a:srgbClr val="22282E"/>
                 </a:solidFill>
               </a:rPr>
-              <a:t>•  Genera tráfico. En la VM, navega, resuelve dominios y descarga un archivo benigno para poblar los logs.</a:t>
-            </a:r>
-          </a:p>
-          <a:p>
-            <a:pPr>
-              <a:spcAft>
-                <a:spcPts val="600"/>
-              </a:spcAft>
-            </a:pPr>
-            <a:r>
-              <a:rPr sz="1500">
-                <a:solidFill>
-                  <a:srgbClr val="22282E"/>
-                </a:solidFill>
-              </a:rPr>
-              <a:t>•  Revisa conn.log. Identifica top talkers por bytes y conexiones a puertos poco comunes.</a:t>
-            </a:r>
-          </a:p>
-          <a:p>
-            <a:pPr>
-              <a:spcAft>
-                <a:spcPts val="600"/>
-              </a:spcAft>
-            </a:pPr>
-            <a:r>
-              <a:rPr sz="1500">
-                <a:solidFill>
-                  <a:srgbClr val="22282E"/>
-                </a:solidFill>
-              </a:rPr>
-              <a:t>•  Analiza DNS. En dns.log, busca dominios de alta entropía o subdominios muy largos (indicio de tunneling). Marca dominios recién vistos.</a:t>
-            </a:r>
-          </a:p>
-          <a:p>
-            <a:pPr>
-              <a:spcAft>
-                <a:spcPts val="600"/>
-              </a:spcAft>
-            </a:pPr>
-            <a:r>
-              <a:rPr sz="1500">
-                <a:solidFill>
-                  <a:srgbClr val="22282E"/>
-                </a:solidFill>
-              </a:rPr>
-              <a:t>•  Inspecciona proxy/http.log. Filtra user-agents raros (p. ej. python-requests, cadenas vacías) y métodos POST voluminosos.</a:t>
-            </a:r>
-          </a:p>
-          <a:p>
-            <a:pPr>
-              <a:spcAft>
-                <a:spcPts val="600"/>
-              </a:spcAft>
-            </a:pPr>
-            <a:r>
-              <a:rPr sz="1500">
-                <a:solidFill>
-                  <a:srgbClr val="22282E"/>
-                </a:solidFill>
-              </a:rPr>
-              <a:t>•  Fingerprint TLS. En ssl.log revisa JA3; compáralo con listas conocidas de herramientas para detectar clientes anómalos.</a:t>
-            </a:r>
-          </a:p>
-          <a:p>
-            <a:pPr>
-              <a:spcAft>
-                <a:spcPts val="600"/>
-              </a:spcAft>
-            </a:pPr>
-            <a:r>
-              <a:rPr sz="1500">
-                <a:solidFill>
-                  <a:srgbClr val="22282E"/>
-                </a:solidFill>
-              </a:rPr>
-              <a:t>•  Ejecuta RITA. Importa los logs de Zeek y corre el análisis de beaconing y DNS tunneling; interpreta el score.</a:t>
-            </a:r>
-          </a:p>
-          <a:p>
-            <a:pPr>
-              <a:spcAft>
-                <a:spcPts val="600"/>
-              </a:spcAft>
-            </a:pPr>
-            <a:r>
-              <a:rPr sz="1500">
-                <a:solidFill>
-                  <a:srgbClr val="22282E"/>
-                </a:solidFill>
-              </a:rPr>
-              <a:t>•  Simula exfiltración lenta. Envía datos benignos en pequeños fragmentos DNS a un servidor de laboratorio y confirma que tus consultas lo detectan.</a:t>
+              <a:t>•  NSM (Network Security Monitoring): recolección y análisis de datos de red para detectar intrusiones. Característica: visibilidad independiente del host.</a:t>
+            </a:r>
+          </a:p>
+          <a:p>
+            <a:pPr>
+              <a:spcAft>
+                <a:spcPts val="600"/>
+              </a:spcAft>
+            </a:pPr>
+            <a:r>
+              <a:rPr sz="1500">
+                <a:solidFill>
+                  <a:srgbClr val="22282E"/>
+                </a:solidFill>
+              </a:rPr>
+              <a:t>•  conn.log (Zeek): registro de cada conexión con duración, bytes y estado. Característica: base para top talkers y anomalías de volumen.</a:t>
+            </a:r>
+          </a:p>
+          <a:p>
+            <a:pPr>
+              <a:spcAft>
+                <a:spcPts val="600"/>
+              </a:spcAft>
+            </a:pPr>
+            <a:r>
+              <a:rPr sz="1500">
+                <a:solidFill>
+                  <a:srgbClr val="22282E"/>
+                </a:solidFill>
+              </a:rPr>
+              <a:t>•  dns.log (Zeek): consultas y respuestas DNS. Característica: detecta DGA, tunneling y dominios recién registrados.</a:t>
+            </a:r>
+          </a:p>
+          <a:p>
+            <a:pPr>
+              <a:spcAft>
+                <a:spcPts val="600"/>
+              </a:spcAft>
+            </a:pPr>
+            <a:r>
+              <a:rPr sz="1500">
+                <a:solidFill>
+                  <a:srgbClr val="22282E"/>
+                </a:solidFill>
+              </a:rPr>
+              <a:t>•  Proxy log: peticiones web con URL, user-agent, método y respuesta. Característica: revela C2 sobre HTTP/S y descargas.</a:t>
+            </a:r>
+          </a:p>
+          <a:p>
+            <a:pPr>
+              <a:spcAft>
+                <a:spcPts val="600"/>
+              </a:spcAft>
+            </a:pPr>
+            <a:r>
+              <a:rPr sz="1500">
+                <a:solidFill>
+                  <a:srgbClr val="22282E"/>
+                </a:solidFill>
+              </a:rPr>
+              <a:t>•  JA3/JA3S: hash del handshake TLS del cliente/servidor. Característica: identifica herramientas (p. ej. ciertos C2) aun con cifrado.</a:t>
+            </a:r>
+          </a:p>
+          <a:p>
+            <a:pPr>
+              <a:spcAft>
+                <a:spcPts val="600"/>
+              </a:spcAft>
+            </a:pPr>
+            <a:r>
+              <a:rPr sz="1500">
+                <a:solidFill>
+                  <a:srgbClr val="22282E"/>
+                </a:solidFill>
+              </a:rPr>
+              <a:t>•  DNS tunneling: exfiltración/C2 encapsulados en consultas DNS. Característica: dominios largos, alta entropía, muchas subconsultas.</a:t>
+            </a:r>
+          </a:p>
+          <a:p>
+            <a:pPr>
+              <a:spcAft>
+                <a:spcPts val="600"/>
+              </a:spcAft>
+            </a:pPr>
+            <a:r>
+              <a:rPr sz="1500">
+                <a:solidFill>
+                  <a:srgbClr val="22282E"/>
+                </a:solidFill>
+              </a:rPr>
+              <a:t>•  Beaconing: conexiones periódicas y regulares a un C2. Característica: patrón temporal casi constante (se profundiza en la clase 193).</a:t>
             </a:r>
           </a:p>
         </p:txBody>
@@ -4629,7 +5320,7 @@
                   <a:srgbClr val="0B3D2E"/>
                 </a:solidFill>
               </a:rPr>
-              <a:t>✍️ Ejercicios</a:t>
+              <a:t>🔍 Investigación guiada — descarga y conexión posterior</a:t>
             </a:r>
           </a:p>
         </p:txBody>
@@ -4667,82 +5358,37 @@
                   <a:srgbClr val="22282E"/>
                 </a:solidFill>
               </a:rPr>
-              <a:t>•  Escribe una consulta que liste los 10 dominios con más subconsultas únicas (posible tunneling).</a:t>
-            </a:r>
-          </a:p>
-          <a:p>
-            <a:pPr>
-              <a:spcAft>
-                <a:spcPts val="600"/>
-              </a:spcAft>
-            </a:pPr>
-            <a:r>
-              <a:rPr sz="1500">
-                <a:solidFill>
-                  <a:srgbClr val="22282E"/>
-                </a:solidFill>
-              </a:rPr>
-              <a:t>•  Detecta descargas de ejecutables desde IPs sin dominio asociado.</a:t>
-            </a:r>
-          </a:p>
-          <a:p>
-            <a:pPr>
-              <a:spcAft>
-                <a:spcPts val="600"/>
-              </a:spcAft>
-            </a:pPr>
-            <a:r>
-              <a:rPr sz="1500">
-                <a:solidFill>
-                  <a:srgbClr val="22282E"/>
-                </a:solidFill>
-              </a:rPr>
-              <a:t>•  Explica cómo JA3 ayuda cuando el tráfico está cifrado.</a:t>
-            </a:r>
-          </a:p>
-          <a:p>
-            <a:pPr>
-              <a:spcAft>
-                <a:spcPts val="600"/>
-              </a:spcAft>
-            </a:pPr>
-            <a:r>
-              <a:rPr sz="1500">
-                <a:solidFill>
-                  <a:srgbClr val="22282E"/>
-                </a:solidFill>
-              </a:rPr>
-              <a:t>•  Diseña una detección de user-agent anómalo para tu entorno.</a:t>
-            </a:r>
-          </a:p>
-          <a:p>
-            <a:pPr>
-              <a:spcAft>
-                <a:spcPts val="600"/>
-              </a:spcAft>
-            </a:pPr>
-            <a:r>
-              <a:rPr sz="1500">
-                <a:solidFill>
-                  <a:srgbClr val="22282E"/>
-                </a:solidFill>
-              </a:rPr>
-              <a:t>•  Correlaciona una alerta de red con el proceso de endpoint que la originó.</a:t>
-            </a:r>
-          </a:p>
-          <a:p>
-            <a:pPr>
-              <a:spcAft>
-                <a:spcPts val="600"/>
-              </a:spcAft>
-            </a:pPr>
-            <a:r>
-              <a:rPr sz="1500">
-                <a:solidFill>
-                  <a:srgbClr val="22282E"/>
-                </a:solidFill>
-              </a:rPr>
-              <a:t>•  Interpreta un resultado de beaconing de RITA y decide si escalar.</a:t>
+              <a:t>•  El proxy registra una descarga desde una URL nueva. Primero se verifica si el tráfico pasó realmente por el proxy y qué identidad estaba asociada. Zeek muestra DNS y TLS/HTTP relacionados mediante…</a:t>
+            </a:r>
+          </a:p>
+          <a:p>
+            <a:pPr>
+              <a:spcAft>
+                <a:spcPts val="600"/>
+              </a:spcAft>
+            </a:pPr>
+            <a:r>
+              <a:rPr sz="1500">
+                <a:solidFill>
+                  <a:srgbClr val="22282E"/>
+                </a:solidFill>
+              </a:rPr>
+              <a:t>•  El archivo extraído se hashea, pero no se afirma ejecución. En EDR aparece una creación de proceso desde la ruta de descargas y una conexión al mismo destino. Esa fuente aporta el eslabón que la red…</a:t>
+            </a:r>
+          </a:p>
+          <a:p>
+            <a:pPr>
+              <a:spcAft>
+                <a:spcPts val="600"/>
+              </a:spcAft>
+            </a:pPr>
+            <a:r>
+              <a:rPr sz="1500">
+                <a:solidFill>
+                  <a:srgbClr val="22282E"/>
+                </a:solidFill>
+              </a:rPr>
+              <a:t>•  La huella TLS coincide con software común; no se usa como veredicto. La rareza proviene de que ese proceso y host nunca habían contactado el destino, junto con el linaje del endpoint. El caso enseña…</a:t>
             </a:r>
           </a:p>
         </p:txBody>
@@ -4793,7 +5439,7 @@
                   <a:srgbClr val="0B3D2E"/>
                 </a:solidFill>
               </a:rPr>
-              <a:t>📝 Reto verificable</a:t>
+              <a:t>✅ Criterio de dominio</a:t>
             </a:r>
           </a:p>
         </p:txBody>
@@ -4831,7 +5477,7 @@
                   <a:srgbClr val="22282E"/>
                 </a:solidFill>
               </a:rPr>
-              <a:t>•  Detecta en tu laboratorio una actividad de red sospechosa (tunneling DNS o exfiltración por HTTP) usando logs de Zeek/proxy y correlaciónala con el endpoint origen. Criterio de aceptación: identificas el dominio/destino anómalo con una justificación basada en datos (entropía, volumen, periodicidad o fingerprint) y enlazas la conexión con el proceso concreto que la generó en el host.</a:t>
+              <a:t>•  El alumno diferencia flow, log de protocolo y PCAP; explica NAT/proxy y pérdida; une logs con identificadores o tiempo justificadamente; y separa descarga, transferencia y ejecución.</a:t>
             </a:r>
           </a:p>
         </p:txBody>
